--- a/チーム制作企画書.pptx
+++ b/チーム制作企画書.pptx
@@ -5,10 +5,9 @@
     <p:sldMasterId id="2147483648" r:id="rId1"/>
   </p:sldMasterIdLst>
   <p:sldIdLst>
-    <p:sldId id="256" r:id="rId2"/>
-    <p:sldId id="257" r:id="rId3"/>
-    <p:sldId id="258" r:id="rId4"/>
-    <p:sldId id="259" r:id="rId5"/>
+    <p:sldId id="257" r:id="rId2"/>
+    <p:sldId id="258" r:id="rId3"/>
+    <p:sldId id="259" r:id="rId4"/>
   </p:sldIdLst>
   <p:sldSz cx="12192000" cy="6858000"/>
   <p:notesSz cx="6858000" cy="9144000"/>
@@ -262,7 +261,7 @@
           <a:p>
             <a:fld id="{DE597735-EB93-4026-A043-166023A3C956}" type="datetimeFigureOut">
               <a:rPr kumimoji="1" lang="ja-JP" altLang="en-US" smtClean="0"/>
-              <a:t>2026/4/23</a:t>
+              <a:t>2026/4/27</a:t>
             </a:fld>
             <a:endParaRPr kumimoji="1" lang="ja-JP" altLang="en-US"/>
           </a:p>
@@ -492,7 +491,7 @@
           <a:p>
             <a:fld id="{DE597735-EB93-4026-A043-166023A3C956}" type="datetimeFigureOut">
               <a:rPr kumimoji="1" lang="ja-JP" altLang="en-US" smtClean="0"/>
-              <a:t>2026/4/23</a:t>
+              <a:t>2026/4/27</a:t>
             </a:fld>
             <a:endParaRPr kumimoji="1" lang="ja-JP" altLang="en-US"/>
           </a:p>
@@ -732,7 +731,7 @@
           <a:p>
             <a:fld id="{DE597735-EB93-4026-A043-166023A3C956}" type="datetimeFigureOut">
               <a:rPr kumimoji="1" lang="ja-JP" altLang="en-US" smtClean="0"/>
-              <a:t>2026/4/23</a:t>
+              <a:t>2026/4/27</a:t>
             </a:fld>
             <a:endParaRPr kumimoji="1" lang="ja-JP" altLang="en-US"/>
           </a:p>
@@ -962,7 +961,7 @@
           <a:p>
             <a:fld id="{DE597735-EB93-4026-A043-166023A3C956}" type="datetimeFigureOut">
               <a:rPr kumimoji="1" lang="ja-JP" altLang="en-US" smtClean="0"/>
-              <a:t>2026/4/23</a:t>
+              <a:t>2026/4/27</a:t>
             </a:fld>
             <a:endParaRPr kumimoji="1" lang="ja-JP" altLang="en-US"/>
           </a:p>
@@ -1237,7 +1236,7 @@
           <a:p>
             <a:fld id="{DE597735-EB93-4026-A043-166023A3C956}" type="datetimeFigureOut">
               <a:rPr kumimoji="1" lang="ja-JP" altLang="en-US" smtClean="0"/>
-              <a:t>2026/4/23</a:t>
+              <a:t>2026/4/27</a:t>
             </a:fld>
             <a:endParaRPr kumimoji="1" lang="ja-JP" altLang="en-US"/>
           </a:p>
@@ -1566,7 +1565,7 @@
           <a:p>
             <a:fld id="{DE597735-EB93-4026-A043-166023A3C956}" type="datetimeFigureOut">
               <a:rPr kumimoji="1" lang="ja-JP" altLang="en-US" smtClean="0"/>
-              <a:t>2026/4/23</a:t>
+              <a:t>2026/4/27</a:t>
             </a:fld>
             <a:endParaRPr kumimoji="1" lang="ja-JP" altLang="en-US"/>
           </a:p>
@@ -2042,7 +2041,7 @@
           <a:p>
             <a:fld id="{DE597735-EB93-4026-A043-166023A3C956}" type="datetimeFigureOut">
               <a:rPr kumimoji="1" lang="ja-JP" altLang="en-US" smtClean="0"/>
-              <a:t>2026/4/23</a:t>
+              <a:t>2026/4/27</a:t>
             </a:fld>
             <a:endParaRPr kumimoji="1" lang="ja-JP" altLang="en-US"/>
           </a:p>
@@ -2183,7 +2182,7 @@
           <a:p>
             <a:fld id="{DE597735-EB93-4026-A043-166023A3C956}" type="datetimeFigureOut">
               <a:rPr kumimoji="1" lang="ja-JP" altLang="en-US" smtClean="0"/>
-              <a:t>2026/4/23</a:t>
+              <a:t>2026/4/27</a:t>
             </a:fld>
             <a:endParaRPr kumimoji="1" lang="ja-JP" altLang="en-US"/>
           </a:p>
@@ -2296,7 +2295,7 @@
           <a:p>
             <a:fld id="{DE597735-EB93-4026-A043-166023A3C956}" type="datetimeFigureOut">
               <a:rPr kumimoji="1" lang="ja-JP" altLang="en-US" smtClean="0"/>
-              <a:t>2026/4/23</a:t>
+              <a:t>2026/4/27</a:t>
             </a:fld>
             <a:endParaRPr kumimoji="1" lang="ja-JP" altLang="en-US"/>
           </a:p>
@@ -2639,7 +2638,7 @@
           <a:p>
             <a:fld id="{DE597735-EB93-4026-A043-166023A3C956}" type="datetimeFigureOut">
               <a:rPr kumimoji="1" lang="ja-JP" altLang="en-US" smtClean="0"/>
-              <a:t>2026/4/23</a:t>
+              <a:t>2026/4/27</a:t>
             </a:fld>
             <a:endParaRPr kumimoji="1" lang="ja-JP" altLang="en-US"/>
           </a:p>
@@ -2927,7 +2926,7 @@
           <a:p>
             <a:fld id="{DE597735-EB93-4026-A043-166023A3C956}" type="datetimeFigureOut">
               <a:rPr kumimoji="1" lang="ja-JP" altLang="en-US" smtClean="0"/>
-              <a:t>2026/4/23</a:t>
+              <a:t>2026/4/27</a:t>
             </a:fld>
             <a:endParaRPr kumimoji="1" lang="ja-JP" altLang="en-US"/>
           </a:p>
@@ -3200,7 +3199,7 @@
           <a:p>
             <a:fld id="{DE597735-EB93-4026-A043-166023A3C956}" type="datetimeFigureOut">
               <a:rPr kumimoji="1" lang="ja-JP" altLang="en-US" smtClean="0"/>
-              <a:t>2026/4/23</a:t>
+              <a:t>2026/4/27</a:t>
             </a:fld>
             <a:endParaRPr kumimoji="1" lang="ja-JP" altLang="en-US"/>
           </a:p>
@@ -3619,10 +3618,114 @@
       </p:grpSpPr>
       <p:sp>
         <p:nvSpPr>
-          <p:cNvPr id="4" name="テキスト ボックス 3">
-            <a:extLst>
-              <a:ext uri="{FF2B5EF4-FFF2-40B4-BE49-F238E27FC236}">
-                <a16:creationId xmlns:a16="http://schemas.microsoft.com/office/drawing/2014/main" id="{C735B623-419E-93E4-74AC-3309EB4C0CCE}"/>
+          <p:cNvPr id="3" name="字幕 2">
+            <a:extLst>
+              <a:ext uri="{FF2B5EF4-FFF2-40B4-BE49-F238E27FC236}">
+                <a16:creationId xmlns:a16="http://schemas.microsoft.com/office/drawing/2014/main" id="{7B2FB78E-069A-856B-9E09-521B1F5EA74A}"/>
+              </a:ext>
+            </a:extLst>
+          </p:cNvPr>
+          <p:cNvSpPr>
+            <a:spLocks noGrp="1"/>
+          </p:cNvSpPr>
+          <p:nvPr>
+            <p:ph type="subTitle" idx="1"/>
+          </p:nvPr>
+        </p:nvSpPr>
+        <p:spPr>
+          <a:xfrm>
+            <a:off x="0" y="1"/>
+            <a:ext cx="4221018" cy="2493818"/>
+          </a:xfrm>
+        </p:spPr>
+        <p:txBody>
+          <a:bodyPr>
+            <a:normAutofit fontScale="40000" lnSpcReduction="20000"/>
+          </a:bodyPr>
+          <a:lstStyle/>
+          <a:p>
+            <a:r>
+              <a:rPr lang="ja-JP" altLang="en-US" sz="9600" dirty="0"/>
+              <a:t>　</a:t>
+            </a:r>
+            <a:endParaRPr lang="en-US" altLang="ja-JP" sz="9600" dirty="0"/>
+          </a:p>
+          <a:p>
+            <a:endParaRPr lang="en-US" altLang="ja-JP" sz="2800" dirty="0">
+              <a:solidFill>
+                <a:schemeClr val="accent1">
+                  <a:lumMod val="40000"/>
+                  <a:lumOff val="60000"/>
+                </a:schemeClr>
+              </a:solidFill>
+            </a:endParaRPr>
+          </a:p>
+          <a:p>
+            <a:endParaRPr kumimoji="1" lang="en-US" altLang="ja-JP" sz="6700" dirty="0">
+              <a:solidFill>
+                <a:schemeClr val="accent1">
+                  <a:lumMod val="40000"/>
+                  <a:lumOff val="60000"/>
+                </a:schemeClr>
+              </a:solidFill>
+            </a:endParaRPr>
+          </a:p>
+          <a:p>
+            <a:endParaRPr lang="en-US" altLang="ja-JP" sz="2800" dirty="0">
+              <a:solidFill>
+                <a:schemeClr val="accent1">
+                  <a:lumMod val="40000"/>
+                  <a:lumOff val="60000"/>
+                </a:schemeClr>
+              </a:solidFill>
+            </a:endParaRPr>
+          </a:p>
+          <a:p>
+            <a:endParaRPr kumimoji="1" lang="en-US" altLang="ja-JP" sz="2800" dirty="0">
+              <a:solidFill>
+                <a:schemeClr val="accent1">
+                  <a:lumMod val="40000"/>
+                  <a:lumOff val="60000"/>
+                </a:schemeClr>
+              </a:solidFill>
+            </a:endParaRPr>
+          </a:p>
+          <a:p>
+            <a:endParaRPr lang="en-US" altLang="ja-JP" sz="2800" dirty="0">
+              <a:solidFill>
+                <a:schemeClr val="accent1">
+                  <a:lumMod val="40000"/>
+                  <a:lumOff val="60000"/>
+                </a:schemeClr>
+              </a:solidFill>
+            </a:endParaRPr>
+          </a:p>
+          <a:p>
+            <a:endParaRPr kumimoji="1" lang="en-US" altLang="ja-JP" sz="2800" dirty="0">
+              <a:solidFill>
+                <a:schemeClr val="accent1">
+                  <a:lumMod val="40000"/>
+                  <a:lumOff val="60000"/>
+                </a:schemeClr>
+              </a:solidFill>
+            </a:endParaRPr>
+          </a:p>
+          <a:p>
+            <a:pPr algn="l"/>
+            <a:r>
+              <a:rPr lang="ja-JP" altLang="en-US" sz="2800" dirty="0"/>
+              <a:t>　　　　　　　　　　　　　　　　　　　　　</a:t>
+            </a:r>
+            <a:endParaRPr kumimoji="1" lang="ja-JP" altLang="en-US" sz="9600" dirty="0"/>
+          </a:p>
+        </p:txBody>
+      </p:sp>
+      <p:sp>
+        <p:nvSpPr>
+          <p:cNvPr id="2" name="テキスト ボックス 1">
+            <a:extLst>
+              <a:ext uri="{FF2B5EF4-FFF2-40B4-BE49-F238E27FC236}">
+                <a16:creationId xmlns:a16="http://schemas.microsoft.com/office/drawing/2014/main" id="{5B3B0B11-0737-C048-422F-1182433305DA}"/>
               </a:ext>
             </a:extLst>
           </p:cNvPr>
@@ -3631,8 +3734,8 @@
         </p:nvSpPr>
         <p:spPr>
           <a:xfrm>
-            <a:off x="56271" y="0"/>
-            <a:ext cx="12192000" cy="3970318"/>
+            <a:off x="3315853" y="585190"/>
+            <a:ext cx="6410037" cy="1323439"/>
           </a:xfrm>
           <a:prstGeom prst="rect">
             <a:avLst/>
@@ -3646,116 +3749,103 @@
           <a:lstStyle/>
           <a:p>
             <a:r>
+              <a:rPr kumimoji="1" lang="ja-JP" altLang="en-US" sz="8000" dirty="0">
+                <a:latin typeface="HGP創英角ｺﾞｼｯｸUB" panose="020B0900000000000000" pitchFamily="50" charset="-128"/>
+                <a:ea typeface="HGP創英角ｺﾞｼｯｸUB" panose="020B0900000000000000" pitchFamily="50" charset="-128"/>
+              </a:rPr>
+              <a:t>奈落ラッシュ</a:t>
+            </a:r>
+          </a:p>
+        </p:txBody>
+      </p:sp>
+      <p:sp>
+        <p:nvSpPr>
+          <p:cNvPr id="4" name="テキスト ボックス 3">
+            <a:extLst>
+              <a:ext uri="{FF2B5EF4-FFF2-40B4-BE49-F238E27FC236}">
+                <a16:creationId xmlns:a16="http://schemas.microsoft.com/office/drawing/2014/main" id="{C4221A10-6B3D-A25E-DA00-8CBEAB9FFE30}"/>
+              </a:ext>
+            </a:extLst>
+          </p:cNvPr>
+          <p:cNvSpPr txBox="1"/>
+          <p:nvPr/>
+        </p:nvSpPr>
+        <p:spPr>
+          <a:xfrm>
+            <a:off x="3209636" y="6027003"/>
+            <a:ext cx="6410036" cy="830997"/>
+          </a:xfrm>
+          <a:prstGeom prst="rect">
+            <a:avLst/>
+          </a:prstGeom>
+          <a:noFill/>
+        </p:spPr>
+        <p:txBody>
+          <a:bodyPr wrap="square" rtlCol="0">
+            <a:spAutoFit/>
+          </a:bodyPr>
+          <a:lstStyle/>
+          <a:p>
+            <a:r>
               <a:rPr kumimoji="1" lang="ja-JP" altLang="en-US" dirty="0"/>
-              <a:t>２</a:t>
-            </a:r>
-            <a:r>
-              <a:rPr kumimoji="1" lang="en-US" altLang="ja-JP" dirty="0"/>
-              <a:t>D</a:t>
-            </a:r>
-            <a:r>
-              <a:rPr kumimoji="1" lang="ja-JP" altLang="en-US" dirty="0"/>
-              <a:t>アクションゲーム　</a:t>
-            </a:r>
-            <a:endParaRPr kumimoji="1" lang="en-US" altLang="ja-JP" dirty="0"/>
-          </a:p>
-          <a:p>
-            <a:r>
-              <a:rPr kumimoji="1" lang="ja-JP" altLang="en-US" dirty="0"/>
-              <a:t>世界観</a:t>
-            </a:r>
-            <a:r>
-              <a:rPr lang="ja-JP" altLang="en-US" dirty="0"/>
-              <a:t>は地下世界</a:t>
-            </a:r>
-            <a:endParaRPr lang="en-US" altLang="ja-JP" dirty="0"/>
-          </a:p>
-          <a:p>
-            <a:r>
-              <a:rPr lang="ja-JP" altLang="en-US" dirty="0"/>
-              <a:t>階層（進むごとに敵が強くなる）</a:t>
-            </a:r>
-            <a:endParaRPr lang="en-US" altLang="ja-JP" dirty="0"/>
-          </a:p>
-          <a:p>
-            <a:r>
-              <a:rPr lang="ja-JP" altLang="en-US" dirty="0"/>
-              <a:t>プレイヤーは冒険者</a:t>
-            </a:r>
-            <a:endParaRPr lang="en-US" altLang="ja-JP" dirty="0"/>
-          </a:p>
-          <a:p>
-            <a:r>
-              <a:rPr lang="ja-JP" altLang="en-US" dirty="0"/>
-              <a:t>敵キャラは虫</a:t>
-            </a:r>
-            <a:endParaRPr lang="en-US" altLang="ja-JP" dirty="0"/>
-          </a:p>
-          <a:p>
-            <a:r>
-              <a:rPr lang="ja-JP" altLang="en-US" dirty="0"/>
-              <a:t>最高４種類</a:t>
-            </a:r>
-            <a:endParaRPr lang="en-US" altLang="ja-JP" dirty="0"/>
-          </a:p>
-          <a:p>
-            <a:r>
-              <a:rPr lang="ja-JP" altLang="en-US" dirty="0"/>
-              <a:t>歩くだけ＞飛び道具＞ボス＞飛ぶやつ</a:t>
-            </a:r>
-            <a:endParaRPr lang="en-US" altLang="ja-JP" dirty="0"/>
-          </a:p>
-          <a:p>
-            <a:r>
-              <a:rPr lang="ja-JP" altLang="en-US" dirty="0"/>
-              <a:t>プレイヤーのアクション</a:t>
-            </a:r>
-            <a:endParaRPr lang="en-US" altLang="ja-JP" dirty="0"/>
-          </a:p>
-          <a:p>
-            <a:r>
-              <a:rPr lang="ja-JP" altLang="en-US" dirty="0"/>
-              <a:t>ジャンプ</a:t>
-            </a:r>
-            <a:endParaRPr lang="en-US" altLang="ja-JP" dirty="0"/>
-          </a:p>
-          <a:p>
-            <a:r>
-              <a:rPr lang="ja-JP" altLang="en-US" dirty="0"/>
-              <a:t>ダッシュ</a:t>
-            </a:r>
-            <a:endParaRPr lang="en-US" altLang="ja-JP" dirty="0"/>
-          </a:p>
-          <a:p>
-            <a:r>
-              <a:rPr lang="ja-JP" altLang="en-US" dirty="0"/>
-              <a:t>アイテムを置き無双系にする</a:t>
-            </a:r>
-            <a:endParaRPr lang="en-US" altLang="ja-JP" dirty="0"/>
-          </a:p>
-          <a:p>
-            <a:r>
-              <a:rPr lang="ja-JP" altLang="en-US" dirty="0"/>
-              <a:t>敵の量を増やす</a:t>
-            </a:r>
-            <a:endParaRPr lang="en-US" altLang="ja-JP" dirty="0"/>
-          </a:p>
-          <a:p>
-            <a:r>
-              <a:rPr lang="ja-JP" altLang="en-US" dirty="0"/>
-              <a:t>職業を作る</a:t>
-            </a:r>
-            <a:endParaRPr lang="en-US" altLang="ja-JP" dirty="0"/>
-          </a:p>
-          <a:p>
-            <a:endParaRPr lang="en-US" altLang="ja-JP" dirty="0"/>
-          </a:p>
-        </p:txBody>
-      </p:sp>
+              <a:t>　　　　　</a:t>
+            </a:r>
+            <a:r>
+              <a:rPr kumimoji="1" lang="ja-JP" altLang="en-US" sz="2400" dirty="0"/>
+              <a:t>チーム「ゲーム依存」</a:t>
+            </a:r>
+            <a:br>
+              <a:rPr kumimoji="1" lang="en-US" altLang="ja-JP" sz="2400" dirty="0"/>
+            </a:br>
+            <a:r>
+              <a:rPr kumimoji="1" lang="ja-JP" altLang="en-US" sz="2400" dirty="0"/>
+              <a:t>寺山陽貴　連城陸史　山方誠騎　船迫由雅</a:t>
+            </a:r>
+            <a:endParaRPr kumimoji="1" lang="en-US" altLang="ja-JP" sz="2400" dirty="0"/>
+          </a:p>
+        </p:txBody>
+      </p:sp>
+      <p:pic>
+        <p:nvPicPr>
+          <p:cNvPr id="6" name="図 5">
+            <a:extLst>
+              <a:ext uri="{FF2B5EF4-FFF2-40B4-BE49-F238E27FC236}">
+                <a16:creationId xmlns:a16="http://schemas.microsoft.com/office/drawing/2014/main" id="{C69A9A5E-9607-2F1C-0A93-13E096C0AFCA}"/>
+              </a:ext>
+            </a:extLst>
+          </p:cNvPr>
+          <p:cNvPicPr>
+            <a:picLocks noChangeAspect="1"/>
+          </p:cNvPicPr>
+          <p:nvPr/>
+        </p:nvPicPr>
+        <p:blipFill>
+          <a:blip r:embed="rId2">
+            <a:alphaModFix amt="20000"/>
+            <a:extLst>
+              <a:ext uri="{28A0092B-C50C-407E-A947-70E740481C1C}">
+                <a14:useLocalDpi xmlns:a14="http://schemas.microsoft.com/office/drawing/2010/main" val="0"/>
+              </a:ext>
+            </a:extLst>
+          </a:blip>
+          <a:stretch>
+            <a:fillRect/>
+          </a:stretch>
+        </p:blipFill>
+        <p:spPr>
+          <a:xfrm>
+            <a:off x="364130" y="233218"/>
+            <a:ext cx="11621396" cy="6537036"/>
+          </a:xfrm>
+          <a:prstGeom prst="rect">
+            <a:avLst/>
+          </a:prstGeom>
+        </p:spPr>
+      </p:pic>
     </p:spTree>
     <p:extLst>
       <p:ext uri="{BB962C8B-B14F-4D97-AF65-F5344CB8AC3E}">
-        <p14:creationId xmlns:p14="http://schemas.microsoft.com/office/powerpoint/2010/main" val="2987374521"/>
+        <p14:creationId xmlns:p14="http://schemas.microsoft.com/office/powerpoint/2010/main" val="1167502027"/>
       </p:ext>
     </p:extLst>
   </p:cSld>
@@ -3784,18 +3874,18 @@
       </p:grpSpPr>
       <p:sp>
         <p:nvSpPr>
-          <p:cNvPr id="3" name="字幕 2">
-            <a:extLst>
-              <a:ext uri="{FF2B5EF4-FFF2-40B4-BE49-F238E27FC236}">
-                <a16:creationId xmlns:a16="http://schemas.microsoft.com/office/drawing/2014/main" id="{7B2FB78E-069A-856B-9E09-521B1F5EA74A}"/>
-              </a:ext>
-            </a:extLst>
-          </p:cNvPr>
-          <p:cNvSpPr>
-            <a:spLocks noGrp="1"/>
-          </p:cNvSpPr>
-          <p:nvPr>
-            <p:ph type="subTitle" idx="1"/>
+          <p:cNvPr id="3" name="コンテンツ プレースホルダー 2">
+            <a:extLst>
+              <a:ext uri="{FF2B5EF4-FFF2-40B4-BE49-F238E27FC236}">
+                <a16:creationId xmlns:a16="http://schemas.microsoft.com/office/drawing/2014/main" id="{DD113DBC-DFC7-D2F7-2B10-67BCB1411BBE}"/>
+              </a:ext>
+            </a:extLst>
+          </p:cNvPr>
+          <p:cNvSpPr>
+            <a:spLocks noGrp="1"/>
+          </p:cNvSpPr>
+          <p:nvPr>
+            <p:ph idx="1"/>
           </p:nvPr>
         </p:nvSpPr>
         <p:spPr>
@@ -3806,121 +3896,163 @@
         </p:spPr>
         <p:txBody>
           <a:bodyPr>
-            <a:normAutofit fontScale="92500" lnSpcReduction="20000"/>
+            <a:normAutofit/>
           </a:bodyPr>
           <a:lstStyle/>
           <a:p>
+            <a:pPr marL="0" indent="0">
+              <a:buNone/>
+            </a:pPr>
+            <a:r>
+              <a:rPr kumimoji="1" lang="ja-JP" altLang="en-US" dirty="0"/>
+              <a:t>　　　　　　　　　</a:t>
+            </a:r>
+            <a:r>
+              <a:rPr kumimoji="1" lang="ja-JP" altLang="en-US" sz="9600" dirty="0"/>
+              <a:t>コンセプト</a:t>
+            </a:r>
+            <a:endParaRPr kumimoji="1" lang="en-US" altLang="ja-JP" sz="9600" dirty="0"/>
+          </a:p>
+          <a:p>
+            <a:pPr marL="0" indent="0">
+              <a:buNone/>
+            </a:pPr>
             <a:r>
               <a:rPr lang="ja-JP" altLang="en-US" sz="9600" dirty="0"/>
-              <a:t>　</a:t>
-            </a:r>
-            <a:endParaRPr lang="en-US" altLang="ja-JP" sz="9600" dirty="0"/>
-          </a:p>
-          <a:p>
-            <a:r>
-              <a:rPr lang="ja-JP" altLang="en-US" sz="9600" dirty="0"/>
-              <a:t>タイトル名</a:t>
-            </a:r>
-            <a:endParaRPr lang="en-US" altLang="ja-JP" sz="9600" dirty="0"/>
-          </a:p>
-          <a:p>
-            <a:endParaRPr kumimoji="1" lang="en-US" altLang="ja-JP" sz="9600" dirty="0">
+              <a:t>　　</a:t>
+            </a:r>
+            <a:r>
+              <a:rPr lang="ja-JP" altLang="en-US" sz="9600" dirty="0">
+                <a:solidFill>
+                  <a:schemeClr val="accent2"/>
+                </a:solidFill>
+              </a:rPr>
+              <a:t>探索</a:t>
+            </a:r>
+            <a:r>
+              <a:rPr lang="en-US" altLang="ja-JP" sz="9600" dirty="0"/>
+              <a:t>×</a:t>
+            </a:r>
+            <a:r>
+              <a:rPr lang="ja-JP" altLang="en-US" sz="9600" dirty="0">
+                <a:solidFill>
+                  <a:schemeClr val="accent1">
+                    <a:lumMod val="60000"/>
+                    <a:lumOff val="40000"/>
+                  </a:schemeClr>
+                </a:solidFill>
+              </a:rPr>
+              <a:t>爽快感</a:t>
+            </a:r>
+            <a:endParaRPr lang="en-US" altLang="ja-JP" sz="9600" dirty="0">
               <a:solidFill>
                 <a:schemeClr val="accent1">
-                  <a:lumMod val="40000"/>
-                  <a:lumOff val="60000"/>
+                  <a:lumMod val="60000"/>
+                  <a:lumOff val="40000"/>
                 </a:schemeClr>
               </a:solidFill>
             </a:endParaRPr>
           </a:p>
           <a:p>
-            <a:endParaRPr lang="en-US" altLang="ja-JP" sz="2800" dirty="0">
+            <a:pPr marL="0" indent="0">
+              <a:buNone/>
+            </a:pPr>
+            <a:endParaRPr kumimoji="1" lang="en-US" altLang="ja-JP" sz="2400" dirty="0">
               <a:solidFill>
                 <a:schemeClr val="accent1">
-                  <a:lumMod val="40000"/>
-                  <a:lumOff val="60000"/>
+                  <a:lumMod val="60000"/>
+                  <a:lumOff val="40000"/>
                 </a:schemeClr>
               </a:solidFill>
             </a:endParaRPr>
           </a:p>
           <a:p>
-            <a:endParaRPr kumimoji="1" lang="en-US" altLang="ja-JP" sz="2800" dirty="0">
-              <a:solidFill>
-                <a:schemeClr val="accent1">
-                  <a:lumMod val="40000"/>
-                  <a:lumOff val="60000"/>
-                </a:schemeClr>
-              </a:solidFill>
-            </a:endParaRPr>
-          </a:p>
-          <a:p>
-            <a:endParaRPr lang="en-US" altLang="ja-JP" sz="2800" dirty="0">
-              <a:solidFill>
-                <a:schemeClr val="accent1">
-                  <a:lumMod val="40000"/>
-                  <a:lumOff val="60000"/>
-                </a:schemeClr>
-              </a:solidFill>
-            </a:endParaRPr>
-          </a:p>
-          <a:p>
-            <a:endParaRPr kumimoji="1" lang="en-US" altLang="ja-JP" sz="2800" dirty="0">
-              <a:solidFill>
-                <a:schemeClr val="accent1">
-                  <a:lumMod val="40000"/>
-                  <a:lumOff val="60000"/>
-                </a:schemeClr>
-              </a:solidFill>
-            </a:endParaRPr>
-          </a:p>
-          <a:p>
-            <a:endParaRPr lang="en-US" altLang="ja-JP" sz="2800" dirty="0">
-              <a:solidFill>
-                <a:schemeClr val="accent1">
-                  <a:lumMod val="40000"/>
-                  <a:lumOff val="60000"/>
-                </a:schemeClr>
-              </a:solidFill>
-            </a:endParaRPr>
-          </a:p>
-          <a:p>
-            <a:endParaRPr kumimoji="1" lang="en-US" altLang="ja-JP" sz="2800" dirty="0">
-              <a:solidFill>
-                <a:schemeClr val="accent1">
-                  <a:lumMod val="40000"/>
-                  <a:lumOff val="60000"/>
-                </a:schemeClr>
-              </a:solidFill>
-            </a:endParaRPr>
-          </a:p>
-          <a:p>
-            <a:pPr algn="l"/>
-            <a:r>
-              <a:rPr lang="ja-JP" altLang="en-US" sz="2800" dirty="0"/>
-              <a:t>　　　　　　　　　　　　　　　　　　　　　　チーム名ゲーム依存</a:t>
-            </a:r>
-            <a:endParaRPr lang="en-US" altLang="ja-JP" sz="2800" dirty="0"/>
-          </a:p>
-          <a:p>
-            <a:pPr algn="l"/>
-            <a:r>
-              <a:rPr lang="ja-JP" altLang="en-US" sz="2800" dirty="0"/>
-              <a:t>　　　　　　　　　　チームメイト　寺山陽貴　連城陸史　船迫由雅　山方誠騎</a:t>
-            </a:r>
-            <a:endParaRPr lang="en-US" altLang="ja-JP" sz="2800" dirty="0"/>
-          </a:p>
-          <a:p>
-            <a:endParaRPr kumimoji="1" lang="en-US" altLang="ja-JP" sz="2800" dirty="0"/>
-          </a:p>
-          <a:p>
-            <a:endParaRPr kumimoji="1" lang="ja-JP" altLang="en-US" sz="9600" dirty="0"/>
+            <a:pPr marL="0" indent="0">
+              <a:buNone/>
+            </a:pPr>
+            <a:r>
+              <a:rPr kumimoji="1" lang="ja-JP" altLang="en-US" sz="2400" dirty="0"/>
+              <a:t>大量に沸く敵をなぎ倒していくところに爽快感を感じることができ、「きもちぇ～と」と思えます。</a:t>
+            </a:r>
+            <a:endParaRPr kumimoji="1" lang="en-US" altLang="ja-JP" sz="2400" dirty="0"/>
+          </a:p>
+          <a:p>
+            <a:pPr marL="0" indent="0">
+              <a:buNone/>
+            </a:pPr>
+            <a:endParaRPr kumimoji="1" lang="en-US" altLang="ja-JP" sz="2400" dirty="0"/>
+          </a:p>
+          <a:p>
+            <a:pPr marL="0" indent="0">
+              <a:buNone/>
+            </a:pPr>
+            <a:r>
+              <a:rPr lang="ja-JP" altLang="en-US" sz="6000" dirty="0"/>
+              <a:t>　　　ターゲットユーザー</a:t>
+            </a:r>
+            <a:endParaRPr lang="en-US" altLang="ja-JP" sz="2400" dirty="0"/>
+          </a:p>
+          <a:p>
+            <a:pPr marL="0" indent="0">
+              <a:buNone/>
+            </a:pPr>
+            <a:r>
+              <a:rPr lang="ja-JP" altLang="en-US" sz="4000" dirty="0"/>
+              <a:t>　　　　ホロナイトクリア者（数百万人）</a:t>
+            </a:r>
+            <a:endParaRPr kumimoji="1" lang="ja-JP" altLang="en-US" sz="4000" dirty="0"/>
+          </a:p>
+        </p:txBody>
+      </p:sp>
+      <p:sp>
+        <p:nvSpPr>
+          <p:cNvPr id="2" name="AutoShape 2" descr="【ゼルダ無双 厄災の黙示録】英傑のリーバルとミファーが仲間に♪ 二人ともめちゃ強キャラ！ - 狩人と猫のゲームプレイ日記">
+            <a:extLst>
+              <a:ext uri="{FF2B5EF4-FFF2-40B4-BE49-F238E27FC236}">
+                <a16:creationId xmlns:a16="http://schemas.microsoft.com/office/drawing/2014/main" id="{30495DDA-F64C-34DD-C3E0-46D974889F30}"/>
+              </a:ext>
+            </a:extLst>
+          </p:cNvPr>
+          <p:cNvSpPr>
+            <a:spLocks noChangeAspect="1" noChangeArrowheads="1"/>
+          </p:cNvSpPr>
+          <p:nvPr/>
+        </p:nvSpPr>
+        <p:spPr bwMode="auto">
+          <a:xfrm>
+            <a:off x="5943600" y="3276600"/>
+            <a:ext cx="304800" cy="304800"/>
+          </a:xfrm>
+          <a:prstGeom prst="rect">
+            <a:avLst/>
+          </a:prstGeom>
+          <a:noFill/>
+          <a:extLst>
+            <a:ext uri="{909E8E84-426E-40DD-AFC4-6F175D3DCCD1}">
+              <a14:hiddenFill xmlns:a14="http://schemas.microsoft.com/office/drawing/2010/main">
+                <a:solidFill>
+                  <a:srgbClr val="FFFFFF"/>
+                </a:solidFill>
+              </a14:hiddenFill>
+            </a:ext>
+          </a:extLst>
+        </p:spPr>
+        <p:txBody>
+          <a:bodyPr vert="horz" wrap="square" lIns="91440" tIns="45720" rIns="91440" bIns="45720" numCol="1" anchor="t" anchorCtr="0" compatLnSpc="1">
+            <a:prstTxWarp prst="textNoShape">
+              <a:avLst/>
+            </a:prstTxWarp>
+          </a:bodyPr>
+          <a:lstStyle/>
+          <a:p>
+            <a:endParaRPr lang="ja-JP" altLang="en-US"/>
           </a:p>
         </p:txBody>
       </p:sp>
     </p:spTree>
     <p:extLst>
       <p:ext uri="{BB962C8B-B14F-4D97-AF65-F5344CB8AC3E}">
-        <p14:creationId xmlns:p14="http://schemas.microsoft.com/office/powerpoint/2010/main" val="1167502027"/>
+        <p14:creationId xmlns:p14="http://schemas.microsoft.com/office/powerpoint/2010/main" val="2794806616"/>
       </p:ext>
     </p:extLst>
   </p:cSld>
@@ -3952,154 +4084,6 @@
           <p:cNvPr id="3" name="コンテンツ プレースホルダー 2">
             <a:extLst>
               <a:ext uri="{FF2B5EF4-FFF2-40B4-BE49-F238E27FC236}">
-                <a16:creationId xmlns:a16="http://schemas.microsoft.com/office/drawing/2014/main" id="{DD113DBC-DFC7-D2F7-2B10-67BCB1411BBE}"/>
-              </a:ext>
-            </a:extLst>
-          </p:cNvPr>
-          <p:cNvSpPr>
-            <a:spLocks noGrp="1"/>
-          </p:cNvSpPr>
-          <p:nvPr>
-            <p:ph idx="1"/>
-          </p:nvPr>
-        </p:nvSpPr>
-        <p:spPr>
-          <a:xfrm>
-            <a:off x="0" y="0"/>
-            <a:ext cx="12192000" cy="6858000"/>
-          </a:xfrm>
-        </p:spPr>
-        <p:txBody>
-          <a:bodyPr/>
-          <a:lstStyle/>
-          <a:p>
-            <a:pPr marL="0" indent="0">
-              <a:buNone/>
-            </a:pPr>
-            <a:r>
-              <a:rPr kumimoji="1" lang="ja-JP" altLang="en-US" dirty="0"/>
-              <a:t>　　　　　　　　　</a:t>
-            </a:r>
-            <a:r>
-              <a:rPr kumimoji="1" lang="ja-JP" altLang="en-US" sz="9600" dirty="0"/>
-              <a:t>コンセプト</a:t>
-            </a:r>
-            <a:endParaRPr kumimoji="1" lang="en-US" altLang="ja-JP" sz="9600" dirty="0"/>
-          </a:p>
-          <a:p>
-            <a:pPr marL="0" indent="0">
-              <a:buNone/>
-            </a:pPr>
-            <a:r>
-              <a:rPr lang="ja-JP" altLang="en-US" sz="9600" dirty="0"/>
-              <a:t>　　　</a:t>
-            </a:r>
-            <a:r>
-              <a:rPr lang="ja-JP" altLang="en-US" sz="9600" dirty="0">
-                <a:solidFill>
-                  <a:schemeClr val="accent1">
-                    <a:lumMod val="60000"/>
-                    <a:lumOff val="40000"/>
-                  </a:schemeClr>
-                </a:solidFill>
-              </a:rPr>
-              <a:t>爽快感</a:t>
-            </a:r>
-            <a:endParaRPr lang="en-US" altLang="ja-JP" sz="9600" dirty="0">
-              <a:solidFill>
-                <a:schemeClr val="accent1">
-                  <a:lumMod val="60000"/>
-                  <a:lumOff val="40000"/>
-                </a:schemeClr>
-              </a:solidFill>
-            </a:endParaRPr>
-          </a:p>
-          <a:p>
-            <a:pPr marL="0" indent="0">
-              <a:buNone/>
-            </a:pPr>
-            <a:endParaRPr kumimoji="1" lang="en-US" altLang="ja-JP" sz="2400" dirty="0">
-              <a:solidFill>
-                <a:schemeClr val="accent1">
-                  <a:lumMod val="60000"/>
-                  <a:lumOff val="40000"/>
-                </a:schemeClr>
-              </a:solidFill>
-            </a:endParaRPr>
-          </a:p>
-          <a:p>
-            <a:pPr marL="0" indent="0">
-              <a:buNone/>
-            </a:pPr>
-            <a:r>
-              <a:rPr kumimoji="1" lang="ja-JP" altLang="en-US" sz="2400" dirty="0"/>
-              <a:t>大量に沸く敵をなぎ倒していくところに爽快感を感じることができ、「きもちぇ～と」と思えます。</a:t>
-            </a:r>
-            <a:endParaRPr kumimoji="1" lang="en-US" altLang="ja-JP" sz="2400" dirty="0"/>
-          </a:p>
-          <a:p>
-            <a:pPr marL="0" indent="0">
-              <a:buNone/>
-            </a:pPr>
-            <a:endParaRPr kumimoji="1" lang="en-US" altLang="ja-JP" sz="2400" dirty="0"/>
-          </a:p>
-          <a:p>
-            <a:pPr marL="0" indent="0">
-              <a:buNone/>
-            </a:pPr>
-            <a:r>
-              <a:rPr lang="ja-JP" altLang="en-US" sz="6000" dirty="0"/>
-              <a:t>　　　ターゲットユーザー</a:t>
-            </a:r>
-            <a:endParaRPr lang="en-US" altLang="ja-JP" sz="2400" dirty="0"/>
-          </a:p>
-          <a:p>
-            <a:pPr marL="0" indent="0">
-              <a:buNone/>
-            </a:pPr>
-            <a:r>
-              <a:rPr lang="ja-JP" altLang="en-US" sz="4000" dirty="0"/>
-              <a:t>　　　　数百万人（ホロナイトクリヤ者）</a:t>
-            </a:r>
-            <a:endParaRPr kumimoji="1" lang="ja-JP" altLang="en-US" sz="4000" dirty="0"/>
-          </a:p>
-        </p:txBody>
-      </p:sp>
-    </p:spTree>
-    <p:extLst>
-      <p:ext uri="{BB962C8B-B14F-4D97-AF65-F5344CB8AC3E}">
-        <p14:creationId xmlns:p14="http://schemas.microsoft.com/office/powerpoint/2010/main" val="2794806616"/>
-      </p:ext>
-    </p:extLst>
-  </p:cSld>
-  <p:clrMapOvr>
-    <a:masterClrMapping/>
-  </p:clrMapOvr>
-</p:sld>
-</file>
-
-<file path=ppt/slides/slide4.xml><?xml version="1.0" encoding="utf-8"?>
-<p:sld xmlns:a="http://schemas.openxmlformats.org/drawingml/2006/main" xmlns:r="http://schemas.openxmlformats.org/officeDocument/2006/relationships" xmlns:p="http://schemas.openxmlformats.org/presentationml/2006/main">
-  <p:cSld>
-    <p:spTree>
-      <p:nvGrpSpPr>
-        <p:cNvPr id="1" name=""/>
-        <p:cNvGrpSpPr/>
-        <p:nvPr/>
-      </p:nvGrpSpPr>
-      <p:grpSpPr>
-        <a:xfrm>
-          <a:off x="0" y="0"/>
-          <a:ext cx="0" cy="0"/>
-          <a:chOff x="0" y="0"/>
-          <a:chExt cx="0" cy="0"/>
-        </a:xfrm>
-      </p:grpSpPr>
-      <p:sp>
-        <p:nvSpPr>
-          <p:cNvPr id="3" name="コンテンツ プレースホルダー 2">
-            <a:extLst>
-              <a:ext uri="{FF2B5EF4-FFF2-40B4-BE49-F238E27FC236}">
                 <a16:creationId xmlns:a16="http://schemas.microsoft.com/office/drawing/2014/main" id="{992CA631-609E-1D6B-3781-2ECD70D9265C}"/>
               </a:ext>
             </a:extLst>
@@ -4168,11 +4152,7 @@
             </a:pPr>
             <a:r>
               <a:rPr kumimoji="1" lang="ja-JP" altLang="en-US" sz="2000" dirty="0"/>
-              <a:t>・職業（剣士</a:t>
-            </a:r>
-            <a:r>
-              <a:rPr kumimoji="1" lang="ja-JP" altLang="en-US" sz="2000"/>
-              <a:t>、魔術師）</a:t>
+              <a:t>・職業（剣士、魔術師）</a:t>
             </a:r>
             <a:endParaRPr kumimoji="1" lang="en-US" altLang="ja-JP" sz="2000" dirty="0"/>
           </a:p>
@@ -4182,7 +4162,7 @@
             </a:pPr>
             <a:r>
               <a:rPr lang="ja-JP" altLang="en-US" sz="2000" dirty="0"/>
-              <a:t>・大量の敵をなぎ倒していく無双系ゲーム</a:t>
+              <a:t>・大量の敵を倒しボスを目指す</a:t>
             </a:r>
             <a:endParaRPr lang="en-US" altLang="ja-JP" sz="2000" dirty="0"/>
           </a:p>
@@ -4309,38 +4289,8 @@
         </p:blipFill>
         <p:spPr>
           <a:xfrm>
-            <a:off x="8393906" y="1426441"/>
-            <a:ext cx="3000375" cy="1714500"/>
-          </a:xfrm>
-          <a:prstGeom prst="rect">
-            <a:avLst/>
-          </a:prstGeom>
-        </p:spPr>
-      </p:pic>
-      <p:pic>
-        <p:nvPicPr>
-          <p:cNvPr id="12" name="図 11">
-            <a:extLst>
-              <a:ext uri="{FF2B5EF4-FFF2-40B4-BE49-F238E27FC236}">
-                <a16:creationId xmlns:a16="http://schemas.microsoft.com/office/drawing/2014/main" id="{C659D4F8-A06B-FDBA-9AD2-04205B229559}"/>
-              </a:ext>
-            </a:extLst>
-          </p:cNvPr>
-          <p:cNvPicPr>
-            <a:picLocks noChangeAspect="1"/>
-          </p:cNvPicPr>
-          <p:nvPr/>
-        </p:nvPicPr>
-        <p:blipFill>
-          <a:blip r:embed="rId3"/>
-          <a:stretch>
-            <a:fillRect/>
-          </a:stretch>
-        </p:blipFill>
-        <p:spPr>
-          <a:xfrm>
-            <a:off x="8405979" y="3975676"/>
-            <a:ext cx="2988301" cy="1984850"/>
+            <a:off x="5890851" y="1694293"/>
+            <a:ext cx="5213784" cy="2979305"/>
           </a:xfrm>
           <a:prstGeom prst="rect">
             <a:avLst/>
